--- a/static/downloads/income-streams/SuperAdPro-4-Income-Streams-JA.pptx
+++ b/static/downloads/income-streams/SuperAdPro-4-Income-Streams-JA.pptx
@@ -2293,7 +2293,7 @@
                 <a:ea typeface="Arial" pitchFamily="34" charset="-122"/>
                 <a:cs typeface="Arial" pitchFamily="34" charset="-120"/>
               </a:rPr>
-              <a:t>最大 $103,976</a:t>
+              <a:t>理論上の最大値: $103,976*</a:t>
             </a:r>
             <a:endParaRPr lang="en-US" sz="850" dirty="0"/>
           </a:p>
@@ -2483,7 +2483,7 @@
                 <a:ea typeface="Arial" pitchFamily="34" charset="-122"/>
                 <a:cs typeface="Arial" pitchFamily="34" charset="-120"/>
               </a:rPr>
-              <a:t>無制限</a:t>
+              <a:t>変動</a:t>
             </a:r>
             <a:endParaRPr lang="en-US" sz="850" dirty="0"/>
           </a:p>
@@ -6709,7 +6709,7 @@
                 <a:ea typeface="Arial" pitchFamily="34" charset="-122"/>
                 <a:cs typeface="Arial" pitchFamily="34" charset="-120"/>
               </a:rPr>
-              <a:t>64ポジション全て埋めてボーナス。グリッドリセット — 無制限の継続収入。</a:t>
+              <a:t>64ポジション全て埋めてボーナス。グリッドリセット — メンバーが活動している間の継続収入。</a:t>
             </a:r>
             <a:endParaRPr lang="en-US" sz="850" dirty="0"/>
           </a:p>
@@ -6775,7 +6775,7 @@
                 <a:ea typeface="Arial" pitchFamily="34" charset="-122"/>
                 <a:cs typeface="Arial" pitchFamily="34" charset="-120"/>
               </a:rPr>
-              <a:t>最大 $103,976</a:t>
+              <a:t>理論上の最大値: $103,976*</a:t>
             </a:r>
             <a:pPr algn="ctr" indent="0" marL="0">
               <a:buNone/>
@@ -13159,7 +13159,7 @@
                 <a:ea typeface="Arial" pitchFamily="34" charset="-122"/>
                 <a:cs typeface="Arial" pitchFamily="34" charset="-120"/>
               </a:rPr>
-              <a:t>無制限</a:t>
+              <a:t>変動</a:t>
             </a:r>
             <a:pPr algn="ctr" indent="0" marL="0">
               <a:buNone/>
